--- a/results/MatCare_Project_Walkthrough.pptx
+++ b/results/MatCare_Project_Walkthrough.pptx
@@ -6364,8 +6364,8 @@
         </p:blipFill>
         <p:spPr>
           <a:xfrm>
-            <a:off x="3270029" y="1207008"/>
-            <a:ext cx="5651636" cy="4937760"/>
+            <a:off x="3246137" y="1207008"/>
+            <a:ext cx="5699420" cy="4937760"/>
           </a:xfrm>
           <a:prstGeom prst="rect">
             <a:avLst/>
@@ -6406,7 +6406,7 @@
                 </a:solidFill>
                 <a:latin typeface="Calibri"/>
               </a:rPr>
-              <a:t>Slide 13 of 15 · (a) any obstetric facility  (b) NICU-capable — visibly worse  (c) population by band  (d) hospital but no obstetric unit</a:t>
+              <a:t>Slide 13 of 15 · (a) road distance to any obstetric facility (km)  (b) drive time to NICU-capable (min — different unit)  (c) population by distance band  (d) hospital but no obstetric unit</a:t>
             </a:r>
           </a:p>
         </p:txBody>

--- a/results/MatCare_Project_Walkthrough.pptx
+++ b/results/MatCare_Project_Walkthrough.pptx
@@ -6364,8 +6364,8 @@
         </p:blipFill>
         <p:spPr>
           <a:xfrm>
-            <a:off x="3246137" y="1207008"/>
-            <a:ext cx="5699420" cy="4937760"/>
+            <a:off x="3178991" y="1207008"/>
+            <a:ext cx="5833712" cy="4937760"/>
           </a:xfrm>
           <a:prstGeom prst="rect">
             <a:avLst/>
@@ -6406,7 +6406,7 @@
                 </a:solidFill>
                 <a:latin typeface="Calibri"/>
               </a:rPr>
-              <a:t>Slide 13 of 15 · (a) road distance to any obstetric facility (km)  (b) drive time to NICU-capable (min — different unit)  (c) population by distance band  (d) hospital but no obstetric unit</a:t>
+              <a:t>Slide 13 of 15 · (a) road distance to any obstetric facility (miles)  (b) drive time to NICU-capable (min — different unit)  (c) population by distance band, miles  (d) hospital but no obstetric unit</a:t>
             </a:r>
           </a:p>
         </p:txBody>

--- a/results/MatCare_Project_Walkthrough.pptx
+++ b/results/MatCare_Project_Walkthrough.pptx
@@ -6406,7 +6406,7 @@
                 </a:solidFill>
                 <a:latin typeface="Calibri"/>
               </a:rPr>
-              <a:t>Slide 13 of 15 · (a) road distance to any obstetric facility (miles)  (b) drive time to NICU-capable (min — different unit)  (c) population by distance band, miles  (d) hospital but no obstetric unit</a:t>
+              <a:t>Slide 13 of 15 · (a) road distance to any obstetric facility (miles)  (b) road distance to NICU-capable, same scale — visibly worse  (c) population by distance band, miles  (d) hospital but no obstetric unit</a:t>
             </a:r>
           </a:p>
         </p:txBody>

--- a/results/MatCare_Project_Walkthrough.pptx
+++ b/results/MatCare_Project_Walkthrough.pptx
@@ -3559,7 +3559,7 @@
                 </a:solidFill>
                 <a:latin typeface="Calibri"/>
               </a:rPr>
-              <a:t>Data: US Census (TIGER, 2020 Decennial, ACS 2019–2023) · CMS Provider of Services · HIFLD · OpenStreetMap</a:t>
+              <a:t>Data: US Census (TIGER, 2020 Decennial, ACS 2019–2023) · Centers for Medicare &amp; Medicaid Services (CMS) Provider of Services · HIFLD · OpenStreetMap</a:t>
             </a:r>
           </a:p>
         </p:txBody>
